--- a/ppt/RAG01-Intro.pptx
+++ b/ppt/RAG01-Intro.pptx
@@ -5,10 +5,10 @@
     <p:sldMasterId id="2147483653" r:id="rId1"/>
   </p:sldMasterIdLst>
   <p:notesMasterIdLst>
-    <p:notesMasterId r:id="rId43"/>
+    <p:notesMasterId r:id="rId44"/>
   </p:notesMasterIdLst>
   <p:handoutMasterIdLst>
-    <p:handoutMasterId r:id="rId44"/>
+    <p:handoutMasterId r:id="rId45"/>
   </p:handoutMasterIdLst>
   <p:sldIdLst>
     <p:sldId id="264" r:id="rId2"/>
@@ -51,7 +51,8 @@
     <p:sldId id="322" r:id="rId39"/>
     <p:sldId id="340" r:id="rId40"/>
     <p:sldId id="341" r:id="rId41"/>
-    <p:sldId id="310" r:id="rId42"/>
+    <p:sldId id="346" r:id="rId42"/>
+    <p:sldId id="310" r:id="rId43"/>
   </p:sldIdLst>
   <p:sldSz cx="9144000" cy="6858000" type="screen4x3"/>
   <p:notesSz cx="6648450" cy="9782175"/>
@@ -3705,7 +3706,7 @@
         </p:nvSpPr>
         <p:spPr>
           <a:xfrm>
-            <a:off x="1115616" y="5661248"/>
+            <a:off x="1547664" y="5572223"/>
             <a:ext cx="6400800" cy="551554"/>
           </a:xfrm>
         </p:spPr>
@@ -6814,7 +6815,7 @@
           <a:p>
             <a:r>
               <a:rPr lang="fr-FR" dirty="0"/>
-              <a:t>En biologie un neurone est une cellule connecté à d’autre neurones qui a la faculté de laisser passer ou non un courant électrique</a:t>
+              <a:t>En biologie un neurone est une cellule connectée à d’autre neurones qui a la faculté de laisser passer ou non un courant électrique</a:t>
             </a:r>
           </a:p>
           <a:p>
@@ -8774,6 +8775,342 @@
 </file>
 
 <file path=ppt/slides/slide41.xml><?xml version="1.0" encoding="utf-8"?>
+<p:sld xmlns:a="http://schemas.openxmlformats.org/drawingml/2006/main" xmlns:r="http://schemas.openxmlformats.org/officeDocument/2006/relationships" xmlns:p="http://schemas.openxmlformats.org/presentationml/2006/main">
+  <p:cSld>
+    <p:spTree>
+      <p:nvGrpSpPr>
+        <p:cNvPr id="1" name="">
+          <a:extLst>
+            <a:ext uri="{FF2B5EF4-FFF2-40B4-BE49-F238E27FC236}">
+              <a16:creationId xmlns:a16="http://schemas.microsoft.com/office/drawing/2014/main" id="{0757F6F7-0C00-C60D-BE93-2F43C952AD4A}"/>
+            </a:ext>
+          </a:extLst>
+        </p:cNvPr>
+        <p:cNvGrpSpPr/>
+        <p:nvPr/>
+      </p:nvGrpSpPr>
+      <p:grpSpPr>
+        <a:xfrm>
+          <a:off x="0" y="0"/>
+          <a:ext cx="0" cy="0"/>
+          <a:chOff x="0" y="0"/>
+          <a:chExt cx="0" cy="0"/>
+        </a:xfrm>
+      </p:grpSpPr>
+      <p:sp>
+        <p:nvSpPr>
+          <p:cNvPr id="3" name="Espace réservé du contenu 2">
+            <a:extLst>
+              <a:ext uri="{FF2B5EF4-FFF2-40B4-BE49-F238E27FC236}">
+                <a16:creationId xmlns:a16="http://schemas.microsoft.com/office/drawing/2014/main" id="{C0EFD83B-CDA3-B191-39F8-66DAF4D5C948}"/>
+              </a:ext>
+            </a:extLst>
+          </p:cNvPr>
+          <p:cNvSpPr txBox="1">
+            <a:spLocks/>
+          </p:cNvSpPr>
+          <p:nvPr/>
+        </p:nvSpPr>
+        <p:spPr>
+          <a:xfrm>
+            <a:off x="179512" y="1412776"/>
+            <a:ext cx="8766051" cy="5040560"/>
+          </a:xfrm>
+          <a:prstGeom prst="rect">
+            <a:avLst/>
+          </a:prstGeom>
+        </p:spPr>
+        <p:txBody>
+          <a:bodyPr/>
+          <a:lstStyle>
+            <a:lvl1pPr marL="342900" indent="-342900" algn="l" rtl="0" eaLnBrk="0" fontAlgn="base" hangingPunct="0">
+              <a:spcBef>
+                <a:spcPct val="20000"/>
+              </a:spcBef>
+              <a:spcAft>
+                <a:spcPct val="0"/>
+              </a:spcAft>
+              <a:buClr>
+                <a:schemeClr val="tx1"/>
+              </a:buClr>
+              <a:buFont typeface="Monotype Sorts" pitchFamily="2" charset="2"/>
+              <a:buChar char="o"/>
+              <a:defRPr sz="2800">
+                <a:solidFill>
+                  <a:schemeClr val="tx1"/>
+                </a:solidFill>
+                <a:latin typeface="+mn-lt"/>
+                <a:ea typeface="+mn-ea"/>
+                <a:cs typeface="+mn-cs"/>
+              </a:defRPr>
+            </a:lvl1pPr>
+            <a:lvl2pPr marL="742950" indent="-285750" algn="l" rtl="0" eaLnBrk="0" fontAlgn="base" hangingPunct="0">
+              <a:spcBef>
+                <a:spcPct val="20000"/>
+              </a:spcBef>
+              <a:spcAft>
+                <a:spcPct val="0"/>
+              </a:spcAft>
+              <a:buChar char="–"/>
+              <a:defRPr sz="2400">
+                <a:solidFill>
+                  <a:schemeClr val="tx1"/>
+                </a:solidFill>
+                <a:latin typeface="+mn-lt"/>
+              </a:defRPr>
+            </a:lvl2pPr>
+            <a:lvl3pPr marL="1143000" indent="-228600" algn="l" rtl="0" eaLnBrk="0" fontAlgn="base" hangingPunct="0">
+              <a:spcBef>
+                <a:spcPct val="20000"/>
+              </a:spcBef>
+              <a:spcAft>
+                <a:spcPct val="0"/>
+              </a:spcAft>
+              <a:buChar char="•"/>
+              <a:defRPr sz="2000">
+                <a:solidFill>
+                  <a:schemeClr val="tx1"/>
+                </a:solidFill>
+                <a:latin typeface="+mn-lt"/>
+              </a:defRPr>
+            </a:lvl3pPr>
+            <a:lvl4pPr marL="1600200" indent="-228600" algn="l" rtl="0" eaLnBrk="0" fontAlgn="base" hangingPunct="0">
+              <a:spcBef>
+                <a:spcPct val="20000"/>
+              </a:spcBef>
+              <a:spcAft>
+                <a:spcPct val="0"/>
+              </a:spcAft>
+              <a:buChar char="–"/>
+              <a:defRPr>
+                <a:solidFill>
+                  <a:schemeClr val="tx1"/>
+                </a:solidFill>
+                <a:latin typeface="+mn-lt"/>
+              </a:defRPr>
+            </a:lvl4pPr>
+            <a:lvl5pPr marL="2057400" indent="-228600" algn="l" rtl="0" eaLnBrk="0" fontAlgn="base" hangingPunct="0">
+              <a:spcBef>
+                <a:spcPct val="20000"/>
+              </a:spcBef>
+              <a:spcAft>
+                <a:spcPct val="0"/>
+              </a:spcAft>
+              <a:buChar char="»"/>
+              <a:defRPr sz="1600">
+                <a:solidFill>
+                  <a:schemeClr val="tx1"/>
+                </a:solidFill>
+                <a:latin typeface="+mn-lt"/>
+              </a:defRPr>
+            </a:lvl5pPr>
+            <a:lvl6pPr marL="2514600" indent="-228600" algn="l" rtl="0" fontAlgn="base">
+              <a:spcBef>
+                <a:spcPct val="20000"/>
+              </a:spcBef>
+              <a:spcAft>
+                <a:spcPct val="0"/>
+              </a:spcAft>
+              <a:buChar char="»"/>
+              <a:defRPr sz="1600">
+                <a:solidFill>
+                  <a:schemeClr val="tx1"/>
+                </a:solidFill>
+                <a:latin typeface="+mn-lt"/>
+              </a:defRPr>
+            </a:lvl6pPr>
+            <a:lvl7pPr marL="2971800" indent="-228600" algn="l" rtl="0" fontAlgn="base">
+              <a:spcBef>
+                <a:spcPct val="20000"/>
+              </a:spcBef>
+              <a:spcAft>
+                <a:spcPct val="0"/>
+              </a:spcAft>
+              <a:buChar char="»"/>
+              <a:defRPr sz="1600">
+                <a:solidFill>
+                  <a:schemeClr val="tx1"/>
+                </a:solidFill>
+                <a:latin typeface="+mn-lt"/>
+              </a:defRPr>
+            </a:lvl7pPr>
+            <a:lvl8pPr marL="3429000" indent="-228600" algn="l" rtl="0" fontAlgn="base">
+              <a:spcBef>
+                <a:spcPct val="20000"/>
+              </a:spcBef>
+              <a:spcAft>
+                <a:spcPct val="0"/>
+              </a:spcAft>
+              <a:buChar char="»"/>
+              <a:defRPr sz="1600">
+                <a:solidFill>
+                  <a:schemeClr val="tx1"/>
+                </a:solidFill>
+                <a:latin typeface="+mn-lt"/>
+              </a:defRPr>
+            </a:lvl8pPr>
+            <a:lvl9pPr marL="3886200" indent="-228600" algn="l" rtl="0" fontAlgn="base">
+              <a:spcBef>
+                <a:spcPct val="20000"/>
+              </a:spcBef>
+              <a:spcAft>
+                <a:spcPct val="0"/>
+              </a:spcAft>
+              <a:buChar char="»"/>
+              <a:defRPr sz="1600">
+                <a:solidFill>
+                  <a:schemeClr val="tx1"/>
+                </a:solidFill>
+                <a:latin typeface="+mn-lt"/>
+              </a:defRPr>
+            </a:lvl9pPr>
+          </a:lstStyle>
+          <a:p>
+            <a:r>
+              <a:rPr lang="fr-FR" kern="0" dirty="0"/>
+              <a:t>Langage essentiel pour les Data Sciences</a:t>
+            </a:r>
+          </a:p>
+          <a:p>
+            <a:r>
+              <a:rPr lang="fr-FR" kern="0" dirty="0"/>
+              <a:t>Les environnements de développements</a:t>
+            </a:r>
+          </a:p>
+          <a:p>
+            <a:pPr lvl="1"/>
+            <a:r>
+              <a:rPr lang="fr-FR" kern="0" dirty="0" err="1"/>
+              <a:t>PyCharm</a:t>
+            </a:r>
+            <a:endParaRPr lang="fr-FR" kern="0" dirty="0"/>
+          </a:p>
+          <a:p>
+            <a:pPr lvl="1"/>
+            <a:r>
+              <a:rPr lang="fr-FR" kern="0" dirty="0" err="1"/>
+              <a:t>VSCode</a:t>
+            </a:r>
+            <a:endParaRPr lang="fr-FR" kern="0" dirty="0"/>
+          </a:p>
+          <a:p>
+            <a:pPr lvl="1"/>
+            <a:r>
+              <a:rPr lang="fr-FR" kern="0" dirty="0" err="1"/>
+              <a:t>Spyder</a:t>
+            </a:r>
+            <a:endParaRPr lang="fr-FR" kern="0" dirty="0"/>
+          </a:p>
+          <a:p>
+            <a:pPr lvl="1"/>
+            <a:r>
+              <a:rPr lang="fr-FR" kern="0" dirty="0" err="1"/>
+              <a:t>Jupyter</a:t>
+            </a:r>
+            <a:r>
+              <a:rPr lang="fr-FR" kern="0" dirty="0"/>
+              <a:t> : </a:t>
+            </a:r>
+            <a:r>
+              <a:rPr lang="fr-FR" dirty="0" err="1"/>
+              <a:t>pip</a:t>
+            </a:r>
+            <a:r>
+              <a:rPr lang="fr-FR" dirty="0"/>
+              <a:t> </a:t>
+            </a:r>
+            <a:r>
+              <a:rPr lang="fr-FR" dirty="0" err="1"/>
+              <a:t>install</a:t>
+            </a:r>
+            <a:r>
+              <a:rPr lang="fr-FR" dirty="0"/>
+              <a:t> </a:t>
+            </a:r>
+            <a:r>
+              <a:rPr lang="fr-FR" dirty="0" err="1"/>
+              <a:t>jupyterlab</a:t>
+            </a:r>
+            <a:endParaRPr lang="fr-FR"/>
+          </a:p>
+          <a:p>
+            <a:pPr lvl="1"/>
+            <a:endParaRPr lang="fr-FR" kern="0" dirty="0"/>
+          </a:p>
+          <a:p>
+            <a:endParaRPr lang="fr-FR" kern="0" dirty="0"/>
+          </a:p>
+        </p:txBody>
+      </p:sp>
+      <p:sp>
+        <p:nvSpPr>
+          <p:cNvPr id="5" name="Titre 4">
+            <a:extLst>
+              <a:ext uri="{FF2B5EF4-FFF2-40B4-BE49-F238E27FC236}">
+                <a16:creationId xmlns:a16="http://schemas.microsoft.com/office/drawing/2014/main" id="{50D6C268-3FC6-8BEC-DB7A-8B69D24FAF8E}"/>
+              </a:ext>
+            </a:extLst>
+          </p:cNvPr>
+          <p:cNvSpPr>
+            <a:spLocks noGrp="1"/>
+          </p:cNvSpPr>
+          <p:nvPr>
+            <p:ph type="title"/>
+          </p:nvPr>
+        </p:nvSpPr>
+        <p:spPr/>
+        <p:txBody>
+          <a:bodyPr/>
+          <a:lstStyle/>
+          <a:p>
+            <a:endParaRPr lang="fr-FR"/>
+          </a:p>
+        </p:txBody>
+      </p:sp>
+      <p:pic>
+        <p:nvPicPr>
+          <p:cNvPr id="8" name="Image 7">
+            <a:extLst>
+              <a:ext uri="{FF2B5EF4-FFF2-40B4-BE49-F238E27FC236}">
+                <a16:creationId xmlns:a16="http://schemas.microsoft.com/office/drawing/2014/main" id="{1704D641-C65F-F6B0-06EE-0AFE221AF1D2}"/>
+              </a:ext>
+            </a:extLst>
+          </p:cNvPr>
+          <p:cNvPicPr>
+            <a:picLocks noChangeAspect="1"/>
+          </p:cNvPicPr>
+          <p:nvPr/>
+        </p:nvPicPr>
+        <p:blipFill>
+          <a:blip r:embed="rId2"/>
+          <a:stretch>
+            <a:fillRect/>
+          </a:stretch>
+        </p:blipFill>
+        <p:spPr>
+          <a:xfrm>
+            <a:off x="2483768" y="-25963"/>
+            <a:ext cx="4464496" cy="1437432"/>
+          </a:xfrm>
+          <a:prstGeom prst="rect">
+            <a:avLst/>
+          </a:prstGeom>
+        </p:spPr>
+      </p:pic>
+    </p:spTree>
+    <p:extLst>
+      <p:ext uri="{BB962C8B-B14F-4D97-AF65-F5344CB8AC3E}">
+        <p14:creationId xmlns:p14="http://schemas.microsoft.com/office/powerpoint/2010/main" val="3879394502"/>
+      </p:ext>
+    </p:extLst>
+  </p:cSld>
+  <p:clrMapOvr>
+    <a:masterClrMapping/>
+  </p:clrMapOvr>
+</p:sld>
+</file>
+
+<file path=ppt/slides/slide42.xml><?xml version="1.0" encoding="utf-8"?>
 <p:sld xmlns:a="http://schemas.openxmlformats.org/drawingml/2006/main" xmlns:r="http://schemas.openxmlformats.org/officeDocument/2006/relationships" xmlns:p="http://schemas.openxmlformats.org/presentationml/2006/main">
   <p:cSld>
     <p:spTree>
